--- a/report/答辩.pptx
+++ b/report/答辩.pptx
@@ -4511,6 +4511,41 @@
                 <a:latin typeface="Microsoft YaHei"/>
               </a:rPr>
               <a:t>第 13 页 / 共 14 页</a:t>
+            </a:r>
+          </a:p>
+        </p:txBody>
+      </p:sp>
+      <p:sp>
+        <p:nvSpPr>
+          <p:cNvPr id="6" name="TextBox 5"/>
+          <p:cNvSpPr txBox="1"/>
+          <p:nvPr/>
+        </p:nvSpPr>
+        <p:spPr>
+          <a:xfrm>
+            <a:off x="502920" y="5852160"/>
+            <a:ext cx="11155680" cy="457200"/>
+          </a:xfrm>
+          <a:prstGeom prst="rect">
+            <a:avLst/>
+          </a:prstGeom>
+          <a:noFill/>
+        </p:spPr>
+        <p:txBody>
+          <a:bodyPr wrap="square">
+            <a:spAutoFit/>
+          </a:bodyPr>
+          <a:lstStyle/>
+          <a:p>
+            <a:pPr algn="ctr"/>
+            <a:r>
+              <a:rPr sz="1400" b="1">
+                <a:solidFill>
+                  <a:srgbClr val="505050"/>
+                </a:solidFill>
+                <a:latin typeface="Microsoft YaHei"/>
+              </a:rPr>
+              <a:t>工程规模：402 chunks · 110 评测 queries · pytest 65 passed</a:t>
             </a:r>
           </a:p>
         </p:txBody>

--- a/report/答辩.pptx
+++ b/report/答辩.pptx
@@ -4545,7 +4545,7 @@
                 </a:solidFill>
                 <a:latin typeface="Microsoft YaHei"/>
               </a:rPr>
-              <a:t>工程规模：402 chunks · 110 评测 queries · pytest 65 passed</a:t>
+              <a:t>工程规模：402 chunks · 110 评测 queries · pytest 92 passed</a:t>
             </a:r>
           </a:p>
         </p:txBody>
